--- a/Bases de Datos II/Clases/Clase 13 - Analisis de casos reales/Presentacion.pptx
+++ b/Bases de Datos II/Clases/Clase 13 - Analisis de casos reales/Presentacion.pptx
@@ -19,8 +19,6 @@
     <p:sldId id="267" r:id="rId18"/>
     <p:sldId id="268" r:id="rId19"/>
     <p:sldId id="269" r:id="rId20"/>
-    <p:sldId id="270" r:id="rId21"/>
-    <p:sldId id="271" r:id="rId22"/>
   </p:sldIdLst>
   <p:sldSz cx="12191695" cy="6858000" type="screen4x3"/>
   <p:notesSz cx="6858000" cy="9144000"/>
@@ -5891,1017 +5889,6 @@
         <p:spPr>
           <a:xfrm>
             <a:off x="0" y="0"/>
-            <a:ext cx="12191695" cy="1170432"/>
-          </a:xfrm>
-          <a:prstGeom prst="rect">
-            <a:avLst/>
-          </a:prstGeom>
-          <a:solidFill>
-            <a:srgbClr val="095292"/>
-          </a:solidFill>
-          <a:ln>
-            <a:noFill/>
-          </a:ln>
-        </p:spPr>
-        <p:style>
-          <a:lnRef idx="1">
-            <a:schemeClr val="accent1"/>
-          </a:lnRef>
-          <a:fillRef idx="3">
-            <a:schemeClr val="accent1"/>
-          </a:fillRef>
-          <a:effectRef idx="2">
-            <a:schemeClr val="accent1"/>
-          </a:effectRef>
-          <a:fontRef idx="minor">
-            <a:schemeClr val="lt1"/>
-          </a:fontRef>
-        </p:style>
-        <p:txBody>
-          <a:bodyPr rtlCol="0" anchor="ctr"/>
-          <a:lstStyle/>
-          <a:p>
-            <a:pPr algn="ctr"/>
-          </a:p>
-        </p:txBody>
-      </p:sp>
-      <p:sp>
-        <p:nvSpPr>
-          <p:cNvPr id="3" name="Rectangle 2"/>
-          <p:cNvSpPr/>
-          <p:nvPr/>
-        </p:nvSpPr>
-        <p:spPr>
-          <a:xfrm>
-            <a:off x="0" y="1170432"/>
-            <a:ext cx="12191695" cy="41148"/>
-          </a:xfrm>
-          <a:prstGeom prst="rect">
-            <a:avLst/>
-          </a:prstGeom>
-          <a:solidFill>
-            <a:srgbClr val="FFD000"/>
-          </a:solidFill>
-          <a:ln>
-            <a:noFill/>
-          </a:ln>
-        </p:spPr>
-        <p:style>
-          <a:lnRef idx="1">
-            <a:schemeClr val="accent1"/>
-          </a:lnRef>
-          <a:fillRef idx="3">
-            <a:schemeClr val="accent1"/>
-          </a:fillRef>
-          <a:effectRef idx="2">
-            <a:schemeClr val="accent1"/>
-          </a:effectRef>
-          <a:fontRef idx="minor">
-            <a:schemeClr val="lt1"/>
-          </a:fontRef>
-        </p:style>
-        <p:txBody>
-          <a:bodyPr rtlCol="0" anchor="ctr"/>
-          <a:lstStyle/>
-          <a:p>
-            <a:pPr algn="ctr"/>
-          </a:p>
-        </p:txBody>
-      </p:sp>
-      <p:sp>
-        <p:nvSpPr>
-          <p:cNvPr id="4" name="TextBox 3"/>
-          <p:cNvSpPr txBox="1"/>
-          <p:nvPr/>
-        </p:nvSpPr>
-        <p:spPr>
-          <a:xfrm>
-            <a:off x="457200" y="164592"/>
-            <a:ext cx="11277295" cy="384048"/>
-          </a:xfrm>
-          <a:prstGeom prst="rect">
-            <a:avLst/>
-          </a:prstGeom>
-          <a:noFill/>
-        </p:spPr>
-        <p:txBody>
-          <a:bodyPr wrap="square">
-            <a:spAutoFit/>
-          </a:bodyPr>
-          <a:lstStyle/>
-          <a:p>
-            <a:r>
-              <a:rPr sz="2600" b="1" i="0">
-                <a:solidFill>
-                  <a:srgbClr val="FFFFFF"/>
-                </a:solidFill>
-                <a:latin typeface="Calibri"/>
-              </a:rPr>
-              <a:t>Quiz rapido (cierre)</a:t>
-            </a:r>
-          </a:p>
-        </p:txBody>
-      </p:sp>
-      <p:sp>
-        <p:nvSpPr>
-          <p:cNvPr id="5" name="TextBox 4"/>
-          <p:cNvSpPr txBox="1"/>
-          <p:nvPr/>
-        </p:nvSpPr>
-        <p:spPr>
-          <a:xfrm>
-            <a:off x="457200" y="566928"/>
-            <a:ext cx="11277295" cy="411480"/>
-          </a:xfrm>
-          <a:prstGeom prst="rect">
-            <a:avLst/>
-          </a:prstGeom>
-          <a:noFill/>
-        </p:spPr>
-        <p:txBody>
-          <a:bodyPr wrap="square">
-            <a:spAutoFit/>
-          </a:bodyPr>
-          <a:lstStyle/>
-          <a:p>
-            <a:r>
-              <a:rPr sz="1400" b="0" i="0">
-                <a:solidFill>
-                  <a:srgbClr val="B8D8EE"/>
-                </a:solidFill>
-                <a:latin typeface="Calibri"/>
-              </a:rPr>
-              <a:t>Individual · 8–10 min</a:t>
-            </a:r>
-          </a:p>
-        </p:txBody>
-      </p:sp>
-      <p:sp>
-        <p:nvSpPr>
-          <p:cNvPr id="6" name="TextBox 5"/>
-          <p:cNvSpPr txBox="1"/>
-          <p:nvPr/>
-        </p:nvSpPr>
-        <p:spPr>
-          <a:xfrm>
-            <a:off x="457200" y="1380744"/>
-            <a:ext cx="11277295" cy="5020056"/>
-          </a:xfrm>
-          <a:prstGeom prst="rect">
-            <a:avLst/>
-          </a:prstGeom>
-          <a:noFill/>
-        </p:spPr>
-        <p:txBody>
-          <a:bodyPr wrap="square">
-            <a:spAutoFit/>
-          </a:bodyPr>
-          <a:lstStyle/>
-          <a:p>
-            <a:pPr>
-              <a:spcAft>
-                <a:spcPts val="800"/>
-              </a:spcAft>
-            </a:pPr>
-            <a:r>
-              <a:rPr sz="1200" b="1" i="0">
-                <a:solidFill>
-                  <a:srgbClr val="333333"/>
-                </a:solidFill>
-                <a:latin typeface="Calibri"/>
-              </a:rPr>
-              <a:t>1.</a:t>
-            </a:r>
-            <a:r>
-              <a:rPr sz="1200" b="0" i="0">
-                <a:solidFill>
-                  <a:srgbClr val="333333"/>
-                </a:solidFill>
-                <a:latin typeface="Calibri"/>
-              </a:rPr>
-              <a:t> Analizar un caso real sirve en el PI para:</a:t>
-            </a:r>
-          </a:p>
-          <a:p>
-            <a:pPr>
-              <a:spcAft>
-                <a:spcPts val="800"/>
-              </a:spcAft>
-            </a:pPr>
-            <a:r>
-              <a:rPr sz="1200" b="0" i="0">
-                <a:solidFill>
-                  <a:srgbClr val="333333"/>
-                </a:solidFill>
-                <a:latin typeface="Calibri"/>
-              </a:rPr>
-              <a:t>–   ('A) Copiar el logo', 1)</a:t>
-            </a:r>
-          </a:p>
-          <a:p>
-            <a:pPr>
-              <a:spcAft>
-                <a:spcPts val="800"/>
-              </a:spcAft>
-            </a:pPr>
-            <a:r>
-              <a:rPr sz="1200" b="0" i="0">
-                <a:solidFill>
-                  <a:srgbClr val="333333"/>
-                </a:solidFill>
-                <a:latin typeface="Calibri"/>
-              </a:rPr>
-              <a:t>–   ('B) Extraer lecciones de modelo, seguridad o operaciones a VetCare', 1)</a:t>
-            </a:r>
-          </a:p>
-          <a:p>
-            <a:pPr>
-              <a:spcAft>
-                <a:spcPts val="800"/>
-              </a:spcAft>
-            </a:pPr>
-            <a:r>
-              <a:rPr sz="1200" b="0" i="0">
-                <a:solidFill>
-                  <a:srgbClr val="333333"/>
-                </a:solidFill>
-                <a:latin typeface="Calibri"/>
-              </a:rPr>
-              <a:t>–   ('C) Evitar evidencias', 1)</a:t>
-            </a:r>
-          </a:p>
-          <a:p>
-            <a:pPr>
-              <a:spcAft>
-                <a:spcPts val="800"/>
-              </a:spcAft>
-            </a:pPr>
-            <a:r>
-              <a:rPr sz="1200" b="0" i="0">
-                <a:solidFill>
-                  <a:srgbClr val="333333"/>
-                </a:solidFill>
-                <a:latin typeface="Calibri"/>
-              </a:rPr>
-              <a:t>–   ('D) Eliminar el ER', 1)</a:t>
-            </a:r>
-          </a:p>
-          <a:p>
-            <a:pPr>
-              <a:spcAft>
-                <a:spcPts val="800"/>
-              </a:spcAft>
-            </a:pPr>
-            <a:r>
-              <a:rPr sz="1200" b="0" i="0">
-                <a:solidFill>
-                  <a:srgbClr val="333333"/>
-                </a:solidFill>
-                <a:latin typeface="Calibri"/>
-              </a:rPr>
-              <a:t>–   </a:t>
-            </a:r>
-            <a:r>
-              <a:rPr sz="1200" b="1" i="0">
-                <a:solidFill>
-                  <a:srgbClr val="333333"/>
-                </a:solidFill>
-                <a:latin typeface="Calibri"/>
-              </a:rPr>
-              <a:t>2.</a:t>
-            </a:r>
-            <a:r>
-              <a:rPr sz="1200" b="0" i="0">
-                <a:solidFill>
-                  <a:srgbClr val="333333"/>
-                </a:solidFill>
-                <a:latin typeface="Calibri"/>
-              </a:rPr>
-              <a:t> Lección típica transferable a VetCare:</a:t>
-            </a:r>
-          </a:p>
-          <a:p>
-            <a:pPr>
-              <a:spcAft>
-                <a:spcPts val="800"/>
-              </a:spcAft>
-            </a:pPr>
-            <a:r>
-              <a:rPr sz="1200" b="0" i="0">
-                <a:solidFill>
-                  <a:srgbClr val="333333"/>
-                </a:solidFill>
-                <a:latin typeface="Calibri"/>
-              </a:rPr>
-              <a:t>–   ('A) Ignorar backups', 1)</a:t>
-            </a:r>
-          </a:p>
-          <a:p>
-            <a:pPr>
-              <a:spcAft>
-                <a:spcPts val="800"/>
-              </a:spcAft>
-            </a:pPr>
-            <a:r>
-              <a:rPr sz="1200" b="0" i="0">
-                <a:solidFill>
-                  <a:srgbClr val="333333"/>
-                </a:solidFill>
-                <a:latin typeface="Calibri"/>
-              </a:rPr>
-              <a:t>–   ('B) Auditoría, privilegios y consistencia en operaciones críticas', 1)</a:t>
-            </a:r>
-          </a:p>
-          <a:p>
-            <a:pPr>
-              <a:spcAft>
-                <a:spcPts val="800"/>
-              </a:spcAft>
-            </a:pPr>
-            <a:r>
-              <a:rPr sz="1200" b="0" i="0">
-                <a:solidFill>
-                  <a:srgbClr val="333333"/>
-                </a:solidFill>
-                <a:latin typeface="Calibri"/>
-              </a:rPr>
-              <a:t>–   ('C) SELECT * siempre', 1)</a:t>
-            </a:r>
-          </a:p>
-          <a:p>
-            <a:pPr>
-              <a:spcAft>
-                <a:spcPts val="800"/>
-              </a:spcAft>
-            </a:pPr>
-            <a:r>
-              <a:rPr sz="1200" b="0" i="0">
-                <a:solidFill>
-                  <a:srgbClr val="333333"/>
-                </a:solidFill>
-                <a:latin typeface="Calibri"/>
-              </a:rPr>
-              <a:t>–   ('D) Sin transacciones', 1)</a:t>
-            </a:r>
-          </a:p>
-          <a:p>
-            <a:pPr>
-              <a:spcAft>
-                <a:spcPts val="800"/>
-              </a:spcAft>
-            </a:pPr>
-            <a:r>
-              <a:rPr sz="1200" b="0" i="0">
-                <a:solidFill>
-                  <a:srgbClr val="333333"/>
-                </a:solidFill>
-                <a:latin typeface="Calibri"/>
-              </a:rPr>
-              <a:t>–   </a:t>
-            </a:r>
-            <a:r>
-              <a:rPr sz="1200" b="1" i="0">
-                <a:solidFill>
-                  <a:srgbClr val="333333"/>
-                </a:solidFill>
-                <a:latin typeface="Calibri"/>
-              </a:rPr>
-              <a:t>3.</a:t>
-            </a:r>
-            <a:r>
-              <a:rPr sz="1200" b="0" i="0">
-                <a:solidFill>
-                  <a:srgbClr val="333333"/>
-                </a:solidFill>
-                <a:latin typeface="Calibri"/>
-              </a:rPr>
-              <a:t> Esta clase autónoma pide relacionar el caso con decisiones del propio PI.</a:t>
-            </a:r>
-          </a:p>
-          <a:p>
-            <a:pPr>
-              <a:spcAft>
-                <a:spcPts val="800"/>
-              </a:spcAft>
-            </a:pPr>
-            <a:r>
-              <a:rPr sz="1200" b="0" i="0">
-                <a:solidFill>
-                  <a:srgbClr val="333333"/>
-                </a:solidFill>
-                <a:latin typeface="Calibri"/>
-              </a:rPr>
-              <a:t>–   ('( ) Verdadero    ( ) Falso', 1)</a:t>
-            </a:r>
-          </a:p>
-          <a:p>
-            <a:pPr>
-              <a:spcAft>
-                <a:spcPts val="800"/>
-              </a:spcAft>
-            </a:pPr>
-            <a:r>
-              <a:rPr sz="1200" b="0" i="0">
-                <a:solidFill>
-                  <a:srgbClr val="333333"/>
-                </a:solidFill>
-                <a:latin typeface="Calibri"/>
-              </a:rPr>
-              <a:t>–   </a:t>
-            </a:r>
-            <a:r>
-              <a:rPr sz="1200" b="1" i="0">
-                <a:solidFill>
-                  <a:srgbClr val="333333"/>
-                </a:solidFill>
-                <a:latin typeface="Calibri"/>
-              </a:rPr>
-              <a:t>4.</a:t>
-            </a:r>
-            <a:r>
-              <a:rPr sz="1200" b="0" i="0">
-                <a:solidFill>
-                  <a:srgbClr val="333333"/>
-                </a:solidFill>
-                <a:latin typeface="Calibri"/>
-              </a:rPr>
-              <a:t> Un caso real «bonito» sin amarre a VetCare cumple el entregable.</a:t>
-            </a:r>
-          </a:p>
-          <a:p>
-            <a:pPr>
-              <a:spcAft>
-                <a:spcPts val="800"/>
-              </a:spcAft>
-            </a:pPr>
-            <a:r>
-              <a:rPr sz="1200" b="0" i="0">
-                <a:solidFill>
-                  <a:srgbClr val="333333"/>
-                </a:solidFill>
-                <a:latin typeface="Calibri"/>
-              </a:rPr>
-              <a:t>–   ('( ) Verdadero    ( ) Falso', 1)</a:t>
-            </a:r>
-          </a:p>
-        </p:txBody>
-      </p:sp>
-      <p:sp>
-        <p:nvSpPr>
-          <p:cNvPr id="7" name="TextBox 6"/>
-          <p:cNvSpPr txBox="1"/>
-          <p:nvPr/>
-        </p:nvSpPr>
-        <p:spPr>
-          <a:xfrm>
-            <a:off x="11185855" y="6473952"/>
-            <a:ext cx="640080" cy="274320"/>
-          </a:xfrm>
-          <a:prstGeom prst="rect">
-            <a:avLst/>
-          </a:prstGeom>
-          <a:noFill/>
-        </p:spPr>
-        <p:txBody>
-          <a:bodyPr wrap="square">
-            <a:spAutoFit/>
-          </a:bodyPr>
-          <a:lstStyle/>
-          <a:p>
-            <a:pPr algn="r"/>
-            <a:r>
-              <a:rPr sz="1100" b="0" i="0">
-                <a:solidFill>
-                  <a:srgbClr val="666666"/>
-                </a:solidFill>
-                <a:latin typeface="Calibri"/>
-              </a:rPr>
-              <a:t>14</a:t>
-            </a:r>
-          </a:p>
-        </p:txBody>
-      </p:sp>
-    </p:spTree>
-  </p:cSld>
-  <p:clrMapOvr>
-    <a:masterClrMapping/>
-  </p:clrMapOvr>
-</p:sld>
-</file>
-
-<file path=ppt/slides/slide15.xml><?xml version="1.0" encoding="utf-8"?>
-<p:sld xmlns:a="http://schemas.openxmlformats.org/drawingml/2006/main" xmlns:p="http://schemas.openxmlformats.org/presentationml/2006/main" xmlns:r="http://schemas.openxmlformats.org/officeDocument/2006/relationships">
-  <p:cSld>
-    <p:bg>
-      <p:bgPr>
-        <a:solidFill>
-          <a:srgbClr val="FFFFFF"/>
-        </a:solidFill>
-        <a:effectLst/>
-      </p:bgPr>
-    </p:bg>
-    <p:spTree>
-      <p:nvGrpSpPr>
-        <p:cNvPr id="1" name=""/>
-        <p:cNvGrpSpPr/>
-        <p:nvPr/>
-      </p:nvGrpSpPr>
-      <p:grpSpPr/>
-      <p:sp>
-        <p:nvSpPr>
-          <p:cNvPr id="2" name="Rectangle 1"/>
-          <p:cNvSpPr/>
-          <p:nvPr/>
-        </p:nvSpPr>
-        <p:spPr>
-          <a:xfrm>
-            <a:off x="0" y="0"/>
-            <a:ext cx="12191695" cy="1170432"/>
-          </a:xfrm>
-          <a:prstGeom prst="rect">
-            <a:avLst/>
-          </a:prstGeom>
-          <a:solidFill>
-            <a:srgbClr val="095292"/>
-          </a:solidFill>
-          <a:ln>
-            <a:noFill/>
-          </a:ln>
-        </p:spPr>
-        <p:style>
-          <a:lnRef idx="1">
-            <a:schemeClr val="accent1"/>
-          </a:lnRef>
-          <a:fillRef idx="3">
-            <a:schemeClr val="accent1"/>
-          </a:fillRef>
-          <a:effectRef idx="2">
-            <a:schemeClr val="accent1"/>
-          </a:effectRef>
-          <a:fontRef idx="minor">
-            <a:schemeClr val="lt1"/>
-          </a:fontRef>
-        </p:style>
-        <p:txBody>
-          <a:bodyPr rtlCol="0" anchor="ctr"/>
-          <a:lstStyle/>
-          <a:p>
-            <a:pPr algn="ctr"/>
-          </a:p>
-        </p:txBody>
-      </p:sp>
-      <p:sp>
-        <p:nvSpPr>
-          <p:cNvPr id="3" name="Rectangle 2"/>
-          <p:cNvSpPr/>
-          <p:nvPr/>
-        </p:nvSpPr>
-        <p:spPr>
-          <a:xfrm>
-            <a:off x="0" y="1170432"/>
-            <a:ext cx="12191695" cy="41148"/>
-          </a:xfrm>
-          <a:prstGeom prst="rect">
-            <a:avLst/>
-          </a:prstGeom>
-          <a:solidFill>
-            <a:srgbClr val="FFD000"/>
-          </a:solidFill>
-          <a:ln>
-            <a:noFill/>
-          </a:ln>
-        </p:spPr>
-        <p:style>
-          <a:lnRef idx="1">
-            <a:schemeClr val="accent1"/>
-          </a:lnRef>
-          <a:fillRef idx="3">
-            <a:schemeClr val="accent1"/>
-          </a:fillRef>
-          <a:effectRef idx="2">
-            <a:schemeClr val="accent1"/>
-          </a:effectRef>
-          <a:fontRef idx="minor">
-            <a:schemeClr val="lt1"/>
-          </a:fontRef>
-        </p:style>
-        <p:txBody>
-          <a:bodyPr rtlCol="0" anchor="ctr"/>
-          <a:lstStyle/>
-          <a:p>
-            <a:pPr algn="ctr"/>
-          </a:p>
-        </p:txBody>
-      </p:sp>
-      <p:sp>
-        <p:nvSpPr>
-          <p:cNvPr id="4" name="TextBox 3"/>
-          <p:cNvSpPr txBox="1"/>
-          <p:nvPr/>
-        </p:nvSpPr>
-        <p:spPr>
-          <a:xfrm>
-            <a:off x="457200" y="164592"/>
-            <a:ext cx="11277295" cy="384048"/>
-          </a:xfrm>
-          <a:prstGeom prst="rect">
-            <a:avLst/>
-          </a:prstGeom>
-          <a:noFill/>
-        </p:spPr>
-        <p:txBody>
-          <a:bodyPr wrap="square">
-            <a:spAutoFit/>
-          </a:bodyPr>
-          <a:lstStyle/>
-          <a:p>
-            <a:r>
-              <a:rPr sz="2600" b="1" i="0">
-                <a:solidFill>
-                  <a:srgbClr val="FFFFFF"/>
-                </a:solidFill>
-                <a:latin typeface="Calibri"/>
-              </a:rPr>
-              <a:t>Quiz rapido (cierre) · cont. 2</a:t>
-            </a:r>
-          </a:p>
-        </p:txBody>
-      </p:sp>
-      <p:sp>
-        <p:nvSpPr>
-          <p:cNvPr id="5" name="TextBox 4"/>
-          <p:cNvSpPr txBox="1"/>
-          <p:nvPr/>
-        </p:nvSpPr>
-        <p:spPr>
-          <a:xfrm>
-            <a:off x="457200" y="566928"/>
-            <a:ext cx="11277295" cy="411480"/>
-          </a:xfrm>
-          <a:prstGeom prst="rect">
-            <a:avLst/>
-          </a:prstGeom>
-          <a:noFill/>
-        </p:spPr>
-        <p:txBody>
-          <a:bodyPr wrap="square">
-            <a:spAutoFit/>
-          </a:bodyPr>
-          <a:lstStyle/>
-          <a:p>
-            <a:r>
-              <a:rPr sz="1400" b="0" i="0">
-                <a:solidFill>
-                  <a:srgbClr val="B8D8EE"/>
-                </a:solidFill>
-                <a:latin typeface="Calibri"/>
-              </a:rPr>
-              <a:t>Individual · 8–10 min</a:t>
-            </a:r>
-          </a:p>
-        </p:txBody>
-      </p:sp>
-      <p:sp>
-        <p:nvSpPr>
-          <p:cNvPr id="6" name="TextBox 5"/>
-          <p:cNvSpPr txBox="1"/>
-          <p:nvPr/>
-        </p:nvSpPr>
-        <p:spPr>
-          <a:xfrm>
-            <a:off x="457200" y="1380744"/>
-            <a:ext cx="11277295" cy="5020056"/>
-          </a:xfrm>
-          <a:prstGeom prst="rect">
-            <a:avLst/>
-          </a:prstGeom>
-          <a:noFill/>
-        </p:spPr>
-        <p:txBody>
-          <a:bodyPr wrap="square">
-            <a:spAutoFit/>
-          </a:bodyPr>
-          <a:lstStyle/>
-          <a:p>
-            <a:pPr>
-              <a:spcAft>
-                <a:spcPts val="800"/>
-              </a:spcAft>
-            </a:pPr>
-            <a:r>
-              <a:rPr sz="1200" b="0" i="0">
-                <a:solidFill>
-                  <a:srgbClr val="333333"/>
-                </a:solidFill>
-                <a:latin typeface="Calibri"/>
-              </a:rPr>
-              <a:t>–   </a:t>
-            </a:r>
-            <a:r>
-              <a:rPr sz="1200" b="1" i="0">
-                <a:solidFill>
-                  <a:srgbClr val="333333"/>
-                </a:solidFill>
-                <a:latin typeface="Calibri"/>
-              </a:rPr>
-              <a:t>5.</a:t>
-            </a:r>
-            <a:r>
-              <a:rPr sz="1200" b="0" i="0">
-                <a:solidFill>
-                  <a:srgbClr val="333333"/>
-                </a:solidFill>
-                <a:latin typeface="Calibri"/>
-              </a:rPr>
-              <a:t> Salida esperada del análisis:</a:t>
-            </a:r>
-          </a:p>
-          <a:p>
-            <a:pPr>
-              <a:spcAft>
-                <a:spcPts val="800"/>
-              </a:spcAft>
-            </a:pPr>
-            <a:r>
-              <a:rPr sz="1200" b="0" i="0">
-                <a:solidFill>
-                  <a:srgbClr val="333333"/>
-                </a:solidFill>
-                <a:latin typeface="Calibri"/>
-              </a:rPr>
-              <a:t>–   ('A) Solo resumen de noticias', 1)</a:t>
-            </a:r>
-          </a:p>
-          <a:p>
-            <a:pPr>
-              <a:spcAft>
-                <a:spcPts val="800"/>
-              </a:spcAft>
-            </a:pPr>
-            <a:r>
-              <a:rPr sz="1200" b="0" i="0">
-                <a:solidFill>
-                  <a:srgbClr val="333333"/>
-                </a:solidFill>
-                <a:latin typeface="Calibri"/>
-              </a:rPr>
-              <a:t>–   ('B) 3 lecciones + impacto concreto en su VetCare', 1)</a:t>
-            </a:r>
-          </a:p>
-          <a:p>
-            <a:pPr>
-              <a:spcAft>
-                <a:spcPts val="800"/>
-              </a:spcAft>
-            </a:pPr>
-            <a:r>
-              <a:rPr sz="1200" b="0" i="0">
-                <a:solidFill>
-                  <a:srgbClr val="333333"/>
-                </a:solidFill>
-                <a:latin typeface="Calibri"/>
-              </a:rPr>
-              <a:t>–   ('C) Solo emojis', 1)</a:t>
-            </a:r>
-          </a:p>
-          <a:p>
-            <a:pPr>
-              <a:spcAft>
-                <a:spcPts val="800"/>
-              </a:spcAft>
-            </a:pPr>
-            <a:r>
-              <a:rPr sz="1200" b="0" i="0">
-                <a:solidFill>
-                  <a:srgbClr val="333333"/>
-                </a:solidFill>
-                <a:latin typeface="Calibri"/>
-              </a:rPr>
-              <a:t>–   ('D) Borrar scripts', 1)</a:t>
-            </a:r>
-          </a:p>
-          <a:p>
-            <a:pPr>
-              <a:spcAft>
-                <a:spcPts val="800"/>
-              </a:spcAft>
-            </a:pPr>
-            <a:r>
-              <a:rPr sz="1200" b="0" i="0">
-                <a:solidFill>
-                  <a:srgbClr val="333333"/>
-                </a:solidFill>
-                <a:latin typeface="Calibri"/>
-              </a:rPr>
-              <a:t>–   </a:t>
-            </a:r>
-            <a:r>
-              <a:rPr sz="1200" b="1" i="0">
-                <a:solidFill>
-                  <a:srgbClr val="333333"/>
-                </a:solidFill>
-                <a:latin typeface="Calibri"/>
-              </a:rPr>
-              <a:t>6.</a:t>
-            </a:r>
-            <a:r>
-              <a:rPr sz="1200" b="0" i="0">
-                <a:solidFill>
-                  <a:srgbClr val="333333"/>
-                </a:solidFill>
-                <a:latin typeface="Calibri"/>
-              </a:rPr>
-              <a:t> Incidentes de datos (fugas, inconsistencias) motivan controles que ya vieron en el curso.</a:t>
-            </a:r>
-          </a:p>
-          <a:p>
-            <a:pPr>
-              <a:spcAft>
-                <a:spcPts val="800"/>
-              </a:spcAft>
-            </a:pPr>
-            <a:r>
-              <a:rPr sz="1200" b="0" i="0">
-                <a:solidFill>
-                  <a:srgbClr val="333333"/>
-                </a:solidFill>
-                <a:latin typeface="Calibri"/>
-              </a:rPr>
-              <a:t>–   ('( ) Verdadero    ( ) Falso', 1)</a:t>
-            </a:r>
-          </a:p>
-          <a:p>
-            <a:pPr>
-              <a:spcAft>
-                <a:spcPts val="800"/>
-              </a:spcAft>
-            </a:pPr>
-            <a:r>
-              <a:rPr sz="1200" b="0" i="0">
-                <a:solidFill>
-                  <a:srgbClr val="333333"/>
-                </a:solidFill>
-                <a:latin typeface="Calibri"/>
-              </a:rPr>
-              <a:t>–   </a:t>
-            </a:r>
-            <a:r>
-              <a:rPr sz="1200" b="1" i="0">
-                <a:solidFill>
-                  <a:srgbClr val="333333"/>
-                </a:solidFill>
-                <a:latin typeface="Calibri"/>
-              </a:rPr>
-              <a:t>7.</a:t>
-            </a:r>
-            <a:r>
-              <a:rPr sz="1200" b="0" i="0">
-                <a:solidFill>
-                  <a:srgbClr val="333333"/>
-                </a:solidFill>
-                <a:latin typeface="Calibri"/>
-              </a:rPr>
-              <a:t> Nombre el caso analizado y 1 riesgo que también tiene VetCare.</a:t>
-            </a:r>
-          </a:p>
-          <a:p>
-            <a:pPr>
-              <a:spcAft>
-                <a:spcPts val="800"/>
-              </a:spcAft>
-            </a:pPr>
-            <a:r>
-              <a:rPr sz="1200" b="0" i="0">
-                <a:solidFill>
-                  <a:srgbClr val="333333"/>
-                </a:solidFill>
-                <a:latin typeface="Calibri"/>
-              </a:rPr>
-              <a:t>–   ('Respuesta corta: ____________________________', 1)</a:t>
-            </a:r>
-          </a:p>
-          <a:p>
-            <a:pPr>
-              <a:spcAft>
-                <a:spcPts val="800"/>
-              </a:spcAft>
-            </a:pPr>
-            <a:r>
-              <a:rPr sz="1200" b="0" i="0">
-                <a:solidFill>
-                  <a:srgbClr val="333333"/>
-                </a:solidFill>
-                <a:latin typeface="Calibri"/>
-              </a:rPr>
-              <a:t>–   </a:t>
-            </a:r>
-            <a:r>
-              <a:rPr sz="1200" b="1" i="0">
-                <a:solidFill>
-                  <a:srgbClr val="333333"/>
-                </a:solidFill>
-                <a:latin typeface="Calibri"/>
-              </a:rPr>
-              <a:t>8.</a:t>
-            </a:r>
-            <a:r>
-              <a:rPr sz="1200" b="0" i="0">
-                <a:solidFill>
-                  <a:srgbClr val="333333"/>
-                </a:solidFill>
-                <a:latin typeface="Calibri"/>
-              </a:rPr>
-              <a:t> ¿Qué cambio harán en su PI por esa lección (artefacto concreto)?</a:t>
-            </a:r>
-          </a:p>
-          <a:p>
-            <a:pPr>
-              <a:spcAft>
-                <a:spcPts val="800"/>
-              </a:spcAft>
-            </a:pPr>
-            <a:r>
-              <a:rPr sz="1200" b="0" i="0">
-                <a:solidFill>
-                  <a:srgbClr val="333333"/>
-                </a:solidFill>
-                <a:latin typeface="Calibri"/>
-              </a:rPr>
-              <a:t>–   ('Respuesta corta: ____________________________', 1)</a:t>
-            </a:r>
-          </a:p>
-        </p:txBody>
-      </p:sp>
-      <p:sp>
-        <p:nvSpPr>
-          <p:cNvPr id="7" name="TextBox 6"/>
-          <p:cNvSpPr txBox="1"/>
-          <p:nvPr/>
-        </p:nvSpPr>
-        <p:spPr>
-          <a:xfrm>
-            <a:off x="11185855" y="6473952"/>
-            <a:ext cx="640080" cy="274320"/>
-          </a:xfrm>
-          <a:prstGeom prst="rect">
-            <a:avLst/>
-          </a:prstGeom>
-          <a:noFill/>
-        </p:spPr>
-        <p:txBody>
-          <a:bodyPr wrap="square">
-            <a:spAutoFit/>
-          </a:bodyPr>
-          <a:lstStyle/>
-          <a:p>
-            <a:pPr algn="r"/>
-            <a:r>
-              <a:rPr sz="1100" b="0" i="0">
-                <a:solidFill>
-                  <a:srgbClr val="666666"/>
-                </a:solidFill>
-                <a:latin typeface="Calibri"/>
-              </a:rPr>
-              <a:t>15</a:t>
-            </a:r>
-          </a:p>
-        </p:txBody>
-      </p:sp>
-    </p:spTree>
-  </p:cSld>
-  <p:clrMapOvr>
-    <a:masterClrMapping/>
-  </p:clrMapOvr>
-</p:sld>
-</file>
-
-<file path=ppt/slides/slide16.xml><?xml version="1.0" encoding="utf-8"?>
-<p:sld xmlns:a="http://schemas.openxmlformats.org/drawingml/2006/main" xmlns:p="http://schemas.openxmlformats.org/presentationml/2006/main" xmlns:r="http://schemas.openxmlformats.org/officeDocument/2006/relationships">
-  <p:cSld>
-    <p:bg>
-      <p:bgPr>
-        <a:solidFill>
-          <a:srgbClr val="FFFFFF"/>
-        </a:solidFill>
-        <a:effectLst/>
-      </p:bgPr>
-    </p:bg>
-    <p:spTree>
-      <p:nvGrpSpPr>
-        <p:cNvPr id="1" name=""/>
-        <p:cNvGrpSpPr/>
-        <p:nvPr/>
-      </p:nvGrpSpPr>
-      <p:grpSpPr/>
-      <p:sp>
-        <p:nvSpPr>
-          <p:cNvPr id="2" name="Rectangle 1"/>
-          <p:cNvSpPr/>
-          <p:nvPr/>
-        </p:nvSpPr>
-        <p:spPr>
-          <a:xfrm>
-            <a:off x="0" y="0"/>
             <a:ext cx="12191695" cy="164592"/>
           </a:xfrm>
           <a:prstGeom prst="rect">
@@ -8230,7 +7217,7 @@
                 </a:solidFill>
                 <a:latin typeface="Calibri"/>
               </a:rPr>
-              <a:t>Criterios · quiz/cierre · duda PI</a:t>
+              <a:t>Criterios de exito · cierre · dudas del PI</a:t>
             </a:r>
           </a:p>
         </p:txBody>

--- a/Bases de Datos II/Clases/Clase 13 - Analisis de casos reales/Presentacion.pptx
+++ b/Bases de Datos II/Clases/Clase 13 - Analisis de casos reales/Presentacion.pptx
@@ -5219,7 +5219,7 @@
                 </a:solidFill>
                 <a:latin typeface="Calibri"/>
               </a:rPr>
-              <a:t> (Talleres) — domingo 23:59 cuando aplique taller.</a:t>
+              <a:t> (https://examlab.lovable.app/) — domingo 23:59 cuando aplique taller.</a:t>
             </a:r>
           </a:p>
         </p:txBody>
@@ -5814,7 +5814,7 @@
                 </a:solidFill>
                 <a:latin typeface="Calibri"/>
               </a:rPr>
-              <a:t>Taller de la semana en ExamLab: domingo 23:59 (regla del Acuerdo) cuando aplique.</a:t>
+              <a:t>Taller de la semana en ExamLab (https://examlab.lovable.app/): domingo 23:59 (regla del Acuerdo) cuando aplique.</a:t>
             </a:r>
           </a:p>
         </p:txBody>

--- a/Bases de Datos II/Clases/Clase 13 - Analisis de casos reales/Presentacion.pptx
+++ b/Bases de Datos II/Clases/Clase 13 - Analisis de casos reales/Presentacion.pptx
@@ -7555,22 +7555,6 @@
                 <a:latin typeface="Calibri"/>
               </a:rPr>
               <a:t>–   Esta clase es autonoma (sin encuentro sincrono) precisamente porque no introduce tecnica nueva: aplica en…</a:t>
-            </a:r>
-          </a:p>
-          <a:p>
-            <a:pPr>
-              <a:spcAft>
-                <a:spcPts val="800"/>
-              </a:spcAft>
-            </a:pPr>
-            <a:r>
-              <a:rPr sz="1500" b="0" i="0">
-                <a:solidFill>
-                  <a:srgbClr val="333333"/>
-                </a:solidFill>
-                <a:latin typeface="Calibri"/>
-              </a:rPr>
-              <a:t>–   Error de docente que no domina el tema: dejar que el informe describa el caso ajeno sin conectar ninguna…</a:t>
             </a:r>
           </a:p>
         </p:txBody>

--- a/Bases de Datos II/Clases/Clase 13 - Analisis de casos reales/Presentacion.pptx
+++ b/Bases de Datos II/Clases/Clase 13 - Analisis de casos reales/Presentacion.pptx
@@ -4084,7 +4084,7 @@
                 </a:solidFill>
                 <a:latin typeface="Calibri"/>
               </a:rPr>
-              <a:t>Proponer 3 mejoras concretas al VetCare del equipo.</a:t>
+              <a:t>Proponer 3 mejoras concretas a su VetCare.</a:t>
             </a:r>
           </a:p>
         </p:txBody>
@@ -5169,7 +5169,7 @@
                 </a:solidFill>
                 <a:latin typeface="Calibri"/>
               </a:rPr>
-              <a:t>–   Evidencia en playground (enlace) o archivo SQL/PNG del equipo.</a:t>
+              <a:t>–   Evidencia en playground (enlace) o archivo SQL/PNG propio.</a:t>
             </a:r>
           </a:p>
           <a:p>
@@ -6418,7 +6418,7 @@
                 </a:solidFill>
                 <a:latin typeface="Calibri"/>
               </a:rPr>
-              <a:t>–   Al salir: avance concreto en el paquete VetCare del equipo.</a:t>
+              <a:t>–   Al salir: avance concreto en su paquete VetCare.</a:t>
             </a:r>
           </a:p>
         </p:txBody>
@@ -7858,7 +7858,7 @@
                 </a:solidFill>
                 <a:latin typeface="Calibri"/>
               </a:rPr>
-              <a:t>–   Al final de la demo: dejar enlace/script compartible al equipo.</a:t>
+              <a:t>–   Al final de la demo: dejar enlace/script compartible al grupo.</a:t>
             </a:r>
           </a:p>
         </p:txBody>

--- a/Bases de Datos II/Clases/Clase 13 - Analisis de casos reales/Presentacion.pptx
+++ b/Bases de Datos II/Clases/Clase 13 - Analisis de casos reales/Presentacion.pptx
@@ -5219,7 +5219,7 @@
                 </a:solidFill>
                 <a:latin typeface="Calibri"/>
               </a:rPr>
-              <a:t> (https://examlab.lovable.app/) — domingo 23:59 cuando aplique taller.</a:t>
+              <a:t> (https://uniaj.examlab.workers.dev/) — domingo 23:59 cuando aplique taller.</a:t>
             </a:r>
           </a:p>
         </p:txBody>
@@ -5814,7 +5814,7 @@
                 </a:solidFill>
                 <a:latin typeface="Calibri"/>
               </a:rPr>
-              <a:t>Taller de la semana en ExamLab (https://examlab.lovable.app/): domingo 23:59 (regla del Acuerdo) cuando aplique.</a:t>
+              <a:t>Taller de la semana en ExamLab (https://uniaj.examlab.workers.dev/): domingo 23:59 (regla del Acuerdo) cuando aplique.</a:t>
             </a:r>
           </a:p>
         </p:txBody>

--- a/Bases de Datos II/Clases/Clase 13 - Analisis de casos reales/Presentacion.pptx
+++ b/Bases de Datos II/Clases/Clase 13 - Analisis de casos reales/Presentacion.pptx
@@ -3632,8 +3632,8 @@
         </p:nvSpPr>
         <p:spPr>
           <a:xfrm>
-            <a:off x="457200" y="1234440"/>
-            <a:ext cx="11277295" cy="777240"/>
+            <a:off x="457200" y="1554480"/>
+            <a:ext cx="11277295" cy="1051560"/>
           </a:xfrm>
           <a:prstGeom prst="roundRect">
             <a:avLst>
@@ -3677,7 +3677,7 @@
         </p:nvSpPr>
         <p:spPr>
           <a:xfrm>
-            <a:off x="594360" y="1403604"/>
+            <a:off x="594360" y="1860804"/>
             <a:ext cx="438912" cy="438912"/>
           </a:xfrm>
           <a:prstGeom prst="roundRect">
@@ -3722,7 +3722,7 @@
         </p:nvSpPr>
         <p:spPr>
           <a:xfrm>
-            <a:off x="594360" y="1403604"/>
+            <a:off x="594360" y="1860804"/>
             <a:ext cx="438912" cy="438912"/>
           </a:xfrm>
           <a:prstGeom prst="rect">
@@ -3755,8 +3755,8 @@
         </p:nvSpPr>
         <p:spPr>
           <a:xfrm>
-            <a:off x="1188720" y="1325880"/>
-            <a:ext cx="10271455" cy="612647"/>
+            <a:off x="1188720" y="1645920"/>
+            <a:ext cx="10271455" cy="886968"/>
           </a:xfrm>
           <a:prstGeom prst="rect">
             <a:avLst/>
@@ -3787,8 +3787,8 @@
         </p:nvSpPr>
         <p:spPr>
           <a:xfrm>
-            <a:off x="457200" y="2103120"/>
-            <a:ext cx="11277295" cy="777240"/>
+            <a:off x="457200" y="2697480"/>
+            <a:ext cx="11277295" cy="1051560"/>
           </a:xfrm>
           <a:prstGeom prst="roundRect">
             <a:avLst>
@@ -3832,7 +3832,7 @@
         </p:nvSpPr>
         <p:spPr>
           <a:xfrm>
-            <a:off x="594360" y="2272284"/>
+            <a:off x="594360" y="3003804"/>
             <a:ext cx="438912" cy="438912"/>
           </a:xfrm>
           <a:prstGeom prst="roundRect">
@@ -3877,7 +3877,7 @@
         </p:nvSpPr>
         <p:spPr>
           <a:xfrm>
-            <a:off x="594360" y="2272284"/>
+            <a:off x="594360" y="3003804"/>
             <a:ext cx="438912" cy="438912"/>
           </a:xfrm>
           <a:prstGeom prst="rect">
@@ -3910,8 +3910,8 @@
         </p:nvSpPr>
         <p:spPr>
           <a:xfrm>
-            <a:off x="1188720" y="2194560"/>
-            <a:ext cx="10271455" cy="612647"/>
+            <a:off x="1188720" y="2788920"/>
+            <a:ext cx="10271455" cy="886968"/>
           </a:xfrm>
           <a:prstGeom prst="rect">
             <a:avLst/>
@@ -3942,8 +3942,8 @@
         </p:nvSpPr>
         <p:spPr>
           <a:xfrm>
-            <a:off x="457200" y="2971800"/>
-            <a:ext cx="11277295" cy="777240"/>
+            <a:off x="457200" y="3840480"/>
+            <a:ext cx="11277295" cy="1051560"/>
           </a:xfrm>
           <a:prstGeom prst="roundRect">
             <a:avLst>
@@ -3987,7 +3987,7 @@
         </p:nvSpPr>
         <p:spPr>
           <a:xfrm>
-            <a:off x="594360" y="3140964"/>
+            <a:off x="594360" y="4146804"/>
             <a:ext cx="438912" cy="438912"/>
           </a:xfrm>
           <a:prstGeom prst="roundRect">
@@ -4032,7 +4032,7 @@
         </p:nvSpPr>
         <p:spPr>
           <a:xfrm>
-            <a:off x="594360" y="3140964"/>
+            <a:off x="594360" y="4146804"/>
             <a:ext cx="438912" cy="438912"/>
           </a:xfrm>
           <a:prstGeom prst="rect">
@@ -4065,8 +4065,8 @@
         </p:nvSpPr>
         <p:spPr>
           <a:xfrm>
-            <a:off x="1188720" y="3063240"/>
-            <a:ext cx="10271455" cy="612647"/>
+            <a:off x="1188720" y="3931920"/>
+            <a:ext cx="10271455" cy="886968"/>
           </a:xfrm>
           <a:prstGeom prst="rect">
             <a:avLst/>
@@ -4097,8 +4097,8 @@
         </p:nvSpPr>
         <p:spPr>
           <a:xfrm>
-            <a:off x="457200" y="3840479"/>
-            <a:ext cx="11277295" cy="777240"/>
+            <a:off x="457200" y="4983480"/>
+            <a:ext cx="11277295" cy="1051560"/>
           </a:xfrm>
           <a:prstGeom prst="roundRect">
             <a:avLst>
@@ -4142,7 +4142,7 @@
         </p:nvSpPr>
         <p:spPr>
           <a:xfrm>
-            <a:off x="594360" y="4009643"/>
+            <a:off x="594360" y="5289804"/>
             <a:ext cx="438912" cy="438912"/>
           </a:xfrm>
           <a:prstGeom prst="roundRect">
@@ -4187,7 +4187,7 @@
         </p:nvSpPr>
         <p:spPr>
           <a:xfrm>
-            <a:off x="594360" y="4009643"/>
+            <a:off x="594360" y="5289804"/>
             <a:ext cx="438912" cy="438912"/>
           </a:xfrm>
           <a:prstGeom prst="rect">
@@ -4220,8 +4220,8 @@
         </p:nvSpPr>
         <p:spPr>
           <a:xfrm>
-            <a:off x="1188720" y="3931919"/>
-            <a:ext cx="10271455" cy="612647"/>
+            <a:off x="1188720" y="5074920"/>
+            <a:ext cx="10271455" cy="886968"/>
           </a:xfrm>
           <a:prstGeom prst="rect">
             <a:avLst/>
@@ -8225,8 +8225,8 @@
         </p:blipFill>
         <p:spPr>
           <a:xfrm>
-            <a:off x="1743913" y="1792224"/>
-            <a:ext cx="1051560" cy="1051560"/>
+            <a:off x="1643329" y="1847087"/>
+            <a:ext cx="1252728" cy="1252728"/>
           </a:xfrm>
           <a:prstGeom prst="rect">
             <a:avLst/>
@@ -8241,8 +8241,8 @@
         </p:nvSpPr>
         <p:spPr>
           <a:xfrm>
-            <a:off x="530352" y="2916936"/>
-            <a:ext cx="3478682" cy="502920"/>
+            <a:off x="530352" y="3191256"/>
+            <a:ext cx="3478682" cy="621792"/>
           </a:xfrm>
           <a:prstGeom prst="rect">
             <a:avLst/>
@@ -8429,8 +8429,8 @@
         </p:blipFill>
         <p:spPr>
           <a:xfrm>
-            <a:off x="5570067" y="1792224"/>
-            <a:ext cx="1051560" cy="1051560"/>
+            <a:off x="5469483" y="1847087"/>
+            <a:ext cx="1252728" cy="1252728"/>
           </a:xfrm>
           <a:prstGeom prst="rect">
             <a:avLst/>
@@ -8445,8 +8445,8 @@
         </p:nvSpPr>
         <p:spPr>
           <a:xfrm>
-            <a:off x="4356506" y="2916936"/>
-            <a:ext cx="3478682" cy="502920"/>
+            <a:off x="4356506" y="3191256"/>
+            <a:ext cx="3478682" cy="621792"/>
           </a:xfrm>
           <a:prstGeom prst="rect">
             <a:avLst/>
@@ -8633,8 +8633,8 @@
         </p:blipFill>
         <p:spPr>
           <a:xfrm>
-            <a:off x="9396222" y="1792224"/>
-            <a:ext cx="1051560" cy="1051560"/>
+            <a:off x="9295638" y="1847087"/>
+            <a:ext cx="1252728" cy="1252728"/>
           </a:xfrm>
           <a:prstGeom prst="rect">
             <a:avLst/>
@@ -8649,8 +8649,8 @@
         </p:nvSpPr>
         <p:spPr>
           <a:xfrm>
-            <a:off x="8182660" y="2916936"/>
-            <a:ext cx="3478682" cy="502920"/>
+            <a:off x="8182660" y="3191256"/>
+            <a:ext cx="3478682" cy="621792"/>
           </a:xfrm>
           <a:prstGeom prst="rect">
             <a:avLst/>

--- a/Bases de Datos II/Clases/Clase 13 - Analisis de casos reales/Presentacion.pptx
+++ b/Bases de Datos II/Clases/Clase 13 - Analisis de casos reales/Presentacion.pptx
@@ -5169,7 +5169,23 @@
                 </a:solidFill>
                 <a:latin typeface="Calibri"/>
               </a:rPr>
-              <a:t>–   Evidencia en playground (enlace) o archivo SQL/PNG propio.</a:t>
+              <a:t>–   Evidencia: el SQL y su salida quedan guardados en cada pregunta de ExamLab.</a:t>
+            </a:r>
+          </a:p>
+          <a:p>
+            <a:pPr>
+              <a:spcAft>
+                <a:spcPts val="800"/>
+              </a:spcAft>
+            </a:pPr>
+            <a:r>
+              <a:rPr sz="1600" b="0" i="0">
+                <a:solidFill>
+                  <a:srgbClr val="333333"/>
+                </a:solidFill>
+                <a:latin typeface="Calibri"/>
+              </a:rPr>
+              <a:t>–   Conserva copia en tu carpeta del PI (los .sql que pide el entregable).</a:t>
             </a:r>
           </a:p>
           <a:p>

--- a/Bases de Datos II/Clases/Clase 13 - Analisis de casos reales/Presentacion.pptx
+++ b/Bases de Datos II/Clases/Clase 13 - Analisis de casos reales/Presentacion.pptx
@@ -5129,7 +5129,7 @@
               </a:spcAft>
             </a:pPr>
             <a:r>
-              <a:rPr sz="1600" b="0" i="0">
+              <a:rPr sz="2000" b="0" i="0">
                 <a:solidFill>
                   <a:srgbClr val="333333"/>
                 </a:solidFill>
@@ -5138,7 +5138,7 @@
               <a:t>–   </a:t>
             </a:r>
             <a:r>
-              <a:rPr sz="1600" b="1" i="0">
+              <a:rPr sz="2000" b="1" i="0">
                 <a:solidFill>
                   <a:srgbClr val="333333"/>
                 </a:solidFill>
@@ -5147,7 +5147,7 @@
               <a:t>Entregable:</a:t>
             </a:r>
             <a:r>
-              <a:rPr sz="1600" b="0" i="0">
+              <a:rPr sz="2000" b="0" i="0">
                 <a:solidFill>
                   <a:srgbClr val="333333"/>
                 </a:solidFill>
@@ -5163,7 +5163,7 @@
               </a:spcAft>
             </a:pPr>
             <a:r>
-              <a:rPr sz="1600" b="0" i="0">
+              <a:rPr sz="2000" b="0" i="0">
                 <a:solidFill>
                   <a:srgbClr val="333333"/>
                 </a:solidFill>
@@ -5179,7 +5179,7 @@
               </a:spcAft>
             </a:pPr>
             <a:r>
-              <a:rPr sz="1600" b="0" i="0">
+              <a:rPr sz="2000" b="0" i="0">
                 <a:solidFill>
                   <a:srgbClr val="333333"/>
                 </a:solidFill>
@@ -5195,7 +5195,7 @@
               </a:spcAft>
             </a:pPr>
             <a:r>
-              <a:rPr sz="1600" b="0" i="0">
+              <a:rPr sz="2000" b="0" i="0">
                 <a:solidFill>
                   <a:srgbClr val="333333"/>
                 </a:solidFill>
@@ -5211,7 +5211,7 @@
               </a:spcAft>
             </a:pPr>
             <a:r>
-              <a:rPr sz="1600" b="0" i="0">
+              <a:rPr sz="2000" b="0" i="0">
                 <a:solidFill>
                   <a:srgbClr val="333333"/>
                 </a:solidFill>
@@ -5220,7 +5220,7 @@
               <a:t>–   </a:t>
             </a:r>
             <a:r>
-              <a:rPr sz="1600" b="1" i="0">
+              <a:rPr sz="2000" b="1" i="0">
                 <a:solidFill>
                   <a:srgbClr val="333333"/>
                 </a:solidFill>
@@ -5229,7 +5229,7 @@
               <a:t>Entrega en ExamLab</a:t>
             </a:r>
             <a:r>
-              <a:rPr sz="1600" b="0" i="0">
+              <a:rPr sz="2000" b="0" i="0">
                 <a:solidFill>
                   <a:srgbClr val="333333"/>
                 </a:solidFill>
@@ -6276,7 +6276,7 @@
               </a:spcAft>
             </a:pPr>
             <a:r>
-              <a:rPr sz="1600" b="0" i="0">
+              <a:rPr sz="2000" b="0" i="0">
                 <a:solidFill>
                   <a:srgbClr val="333333"/>
                 </a:solidFill>
@@ -6285,7 +6285,7 @@
               <a:t>–   </a:t>
             </a:r>
             <a:r>
-              <a:rPr sz="1600" b="1" i="0">
+              <a:rPr sz="2000" b="1" i="0">
                 <a:solidFill>
                   <a:srgbClr val="333333"/>
                 </a:solidFill>
@@ -6294,7 +6294,7 @@
               <a:t>Hoy avanzamos el PI en:</a:t>
             </a:r>
             <a:r>
-              <a:rPr sz="1600" b="0" i="0">
+              <a:rPr sz="2000" b="0" i="0">
                 <a:solidFill>
                   <a:srgbClr val="333333"/>
                 </a:solidFill>
@@ -6310,7 +6310,7 @@
               </a:spcAft>
             </a:pPr>
             <a:r>
-              <a:rPr sz="1600" b="0" i="0">
+              <a:rPr sz="2000" b="0" i="0">
                 <a:solidFill>
                   <a:srgbClr val="333333"/>
                 </a:solidFill>
@@ -6319,7 +6319,7 @@
               <a:t>–   Herramienta: </a:t>
             </a:r>
             <a:r>
-              <a:rPr sz="1600" b="1" i="0">
+              <a:rPr sz="2000" b="1" i="0">
                 <a:solidFill>
                   <a:srgbClr val="333333"/>
                 </a:solidFill>
@@ -6328,7 +6328,7 @@
               <a:t>Google Docs</a:t>
             </a:r>
             <a:r>
-              <a:rPr sz="1600" b="0" i="0">
+              <a:rPr sz="2000" b="0" i="0">
                 <a:solidFill>
                   <a:srgbClr val="333333"/>
                 </a:solidFill>
@@ -6337,7 +6337,7 @@
               <a:t> · Bloque </a:t>
             </a:r>
             <a:r>
-              <a:rPr sz="1600" b="1" i="0">
+              <a:rPr sz="2000" b="1" i="0">
                 <a:solidFill>
                   <a:srgbClr val="333333"/>
                 </a:solidFill>
@@ -6346,7 +6346,7 @@
               <a:t>120 min</a:t>
             </a:r>
             <a:r>
-              <a:rPr sz="1600" b="0" i="0">
+              <a:rPr sz="2000" b="0" i="0">
                 <a:solidFill>
                   <a:srgbClr val="333333"/>
                 </a:solidFill>
@@ -6362,7 +6362,7 @@
               </a:spcAft>
             </a:pPr>
             <a:r>
-              <a:rPr sz="1600" b="0" i="0">
+              <a:rPr sz="2000" b="0" i="0">
                 <a:solidFill>
                   <a:srgbClr val="333333"/>
                 </a:solidFill>
@@ -6371,7 +6371,7 @@
               <a:t>–   </a:t>
             </a:r>
             <a:r>
-              <a:rPr sz="1600" b="1" i="0">
+              <a:rPr sz="2000" b="1" i="0">
                 <a:solidFill>
                   <a:srgbClr val="333333"/>
                 </a:solidFill>
@@ -6380,7 +6380,7 @@
               <a:t>Entregable de hoy:</a:t>
             </a:r>
             <a:r>
-              <a:rPr sz="1600" b="0" i="0">
+              <a:rPr sz="2000" b="0" i="0">
                 <a:solidFill>
                   <a:srgbClr val="333333"/>
                 </a:solidFill>
@@ -6396,7 +6396,7 @@
               </a:spcAft>
             </a:pPr>
             <a:r>
-              <a:rPr sz="1600" b="0" i="0">
+              <a:rPr sz="2000" b="0" i="0">
                 <a:solidFill>
                   <a:srgbClr val="333333"/>
                 </a:solidFill>
@@ -6412,7 +6412,7 @@
               </a:spcAft>
             </a:pPr>
             <a:r>
-              <a:rPr sz="1600" b="0" i="0">
+              <a:rPr sz="2000" b="0" i="0">
                 <a:solidFill>
                   <a:srgbClr val="333333"/>
                 </a:solidFill>
@@ -6428,7 +6428,7 @@
               </a:spcAft>
             </a:pPr>
             <a:r>
-              <a:rPr sz="1600" b="0" i="0">
+              <a:rPr sz="2000" b="0" i="0">
                 <a:solidFill>
                   <a:srgbClr val="333333"/>
                 </a:solidFill>
@@ -6752,7 +6752,7 @@
         <p:spPr>
           <a:xfrm>
             <a:off x="502920" y="2587752"/>
-            <a:ext cx="2164019" cy="2560320"/>
+            <a:ext cx="2164019" cy="3310128"/>
           </a:xfrm>
           <a:prstGeom prst="rect">
             <a:avLst/>
@@ -6867,7 +6867,7 @@
         <p:spPr>
           <a:xfrm>
             <a:off x="2758379" y="2587752"/>
-            <a:ext cx="2164019" cy="2560320"/>
+            <a:ext cx="2164019" cy="3310128"/>
           </a:xfrm>
           <a:prstGeom prst="rect">
             <a:avLst/>
@@ -6982,7 +6982,7 @@
         <p:spPr>
           <a:xfrm>
             <a:off x="5013838" y="2587752"/>
-            <a:ext cx="2164019" cy="2560320"/>
+            <a:ext cx="2164019" cy="3310128"/>
           </a:xfrm>
           <a:prstGeom prst="rect">
             <a:avLst/>
@@ -7097,7 +7097,7 @@
         <p:spPr>
           <a:xfrm>
             <a:off x="7269297" y="2587752"/>
-            <a:ext cx="2164019" cy="2560320"/>
+            <a:ext cx="2164019" cy="3310128"/>
           </a:xfrm>
           <a:prstGeom prst="rect">
             <a:avLst/>
@@ -7212,7 +7212,7 @@
         <p:spPr>
           <a:xfrm>
             <a:off x="9524756" y="2587752"/>
-            <a:ext cx="2164019" cy="2560320"/>
+            <a:ext cx="2164019" cy="3310128"/>
           </a:xfrm>
           <a:prstGeom prst="rect">
             <a:avLst/>
@@ -7246,8 +7246,8 @@
         </p:nvSpPr>
         <p:spPr>
           <a:xfrm>
-            <a:off x="457200" y="5943600"/>
-            <a:ext cx="11277295" cy="365760"/>
+            <a:off x="457200" y="5806440"/>
+            <a:ext cx="11277295" cy="640080"/>
           </a:xfrm>
           <a:prstGeom prst="rect">
             <a:avLst/>
@@ -7500,7 +7500,7 @@
               </a:spcAft>
             </a:pPr>
             <a:r>
-              <a:rPr sz="1500" b="0" i="0">
+              <a:rPr sz="2000" b="0" i="0">
                 <a:solidFill>
                   <a:srgbClr val="333333"/>
                 </a:solidFill>
@@ -7516,7 +7516,7 @@
               </a:spcAft>
             </a:pPr>
             <a:r>
-              <a:rPr sz="1500" b="0" i="0">
+              <a:rPr sz="2000" b="0" i="0">
                 <a:solidFill>
                   <a:srgbClr val="333333"/>
                 </a:solidFill>
@@ -7532,7 +7532,7 @@
               </a:spcAft>
             </a:pPr>
             <a:r>
-              <a:rPr sz="1500" b="0" i="0">
+              <a:rPr sz="2000" b="0" i="0">
                 <a:solidFill>
                   <a:srgbClr val="333333"/>
                 </a:solidFill>
@@ -7548,7 +7548,7 @@
               </a:spcAft>
             </a:pPr>
             <a:r>
-              <a:rPr sz="1500" b="0" i="0">
+              <a:rPr sz="2000" b="0" i="0">
                 <a:solidFill>
                   <a:srgbClr val="333333"/>
                 </a:solidFill>
@@ -7564,7 +7564,7 @@
               </a:spcAft>
             </a:pPr>
             <a:r>
-              <a:rPr sz="1500" b="0" i="0">
+              <a:rPr sz="2000" b="0" i="0">
                 <a:solidFill>
                   <a:srgbClr val="333333"/>
                 </a:solidFill>
@@ -7784,7 +7784,7 @@
               </a:spcAft>
             </a:pPr>
             <a:r>
-              <a:rPr sz="1600" b="0" i="0">
+              <a:rPr sz="2000" b="0" i="0">
                 <a:solidFill>
                   <a:srgbClr val="333333"/>
                 </a:solidFill>
@@ -7793,7 +7793,7 @@
               <a:t>–   </a:t>
             </a:r>
             <a:r>
-              <a:rPr sz="1600" b="1" i="0">
+              <a:rPr sz="2000" b="1" i="0">
                 <a:solidFill>
                   <a:srgbClr val="333333"/>
                 </a:solidFill>
@@ -7802,7 +7802,7 @@
               <a:t>Herramienta:</a:t>
             </a:r>
             <a:r>
-              <a:rPr sz="1600" b="0" i="0">
+              <a:rPr sz="2000" b="0" i="0">
                 <a:solidFill>
                   <a:srgbClr val="333333"/>
                 </a:solidFill>
@@ -7818,7 +7818,7 @@
               </a:spcAft>
             </a:pPr>
             <a:r>
-              <a:rPr sz="1600" b="0" i="0">
+              <a:rPr sz="2000" b="0" i="0">
                 <a:solidFill>
                   <a:srgbClr val="333333"/>
                 </a:solidFill>
@@ -7827,7 +7827,7 @@
               <a:t>–   </a:t>
             </a:r>
             <a:r>
-              <a:rPr sz="1600" b="1" i="0">
+              <a:rPr sz="2000" b="1" i="0">
                 <a:solidFill>
                   <a:srgbClr val="333333"/>
                 </a:solidFill>
@@ -7836,7 +7836,7 @@
               <a:t>Demo:</a:t>
             </a:r>
             <a:r>
-              <a:rPr sz="1600" b="0" i="0">
+              <a:rPr sz="2000" b="0" i="0">
                 <a:solidFill>
                   <a:srgbClr val="333333"/>
                 </a:solidFill>
@@ -7852,7 +7852,7 @@
               </a:spcAft>
             </a:pPr>
             <a:r>
-              <a:rPr sz="1600" b="0" i="0">
+              <a:rPr sz="2000" b="0" i="0">
                 <a:solidFill>
                   <a:srgbClr val="333333"/>
                 </a:solidFill>
@@ -7868,7 +7868,7 @@
               </a:spcAft>
             </a:pPr>
             <a:r>
-              <a:rPr sz="1600" b="0" i="0">
+              <a:rPr sz="2000" b="0" i="0">
                 <a:solidFill>
                   <a:srgbClr val="333333"/>
                 </a:solidFill>
@@ -8915,7 +8915,7 @@
               </a:spcAft>
             </a:pPr>
             <a:r>
-              <a:rPr sz="1600" b="0" i="0">
+              <a:rPr sz="2000" b="0" i="0">
                 <a:solidFill>
                   <a:srgbClr val="333333"/>
                 </a:solidFill>
@@ -8924,7 +8924,7 @@
               <a:t>–   </a:t>
             </a:r>
             <a:r>
-              <a:rPr sz="1600" b="1" i="0">
+              <a:rPr sz="2000" b="1" i="0">
                 <a:solidFill>
                   <a:srgbClr val="333333"/>
                 </a:solidFill>
@@ -8933,7 +8933,7 @@
               <a:t>Por qué importa al PI:</a:t>
             </a:r>
             <a:r>
-              <a:rPr sz="1600" b="0" i="0">
+              <a:rPr sz="2000" b="0" i="0">
                 <a:solidFill>
                   <a:srgbClr val="333333"/>
                 </a:solidFill>
@@ -8949,7 +8949,7 @@
               </a:spcAft>
             </a:pPr>
             <a:r>
-              <a:rPr sz="1600" b="0" i="0">
+              <a:rPr sz="2000" b="0" i="0">
                 <a:solidFill>
                   <a:srgbClr val="333333"/>
                 </a:solidFill>
@@ -9169,7 +9169,7 @@
               </a:spcAft>
             </a:pPr>
             <a:r>
-              <a:rPr sz="1500" b="0" i="0">
+              <a:rPr sz="2000" b="0" i="0">
                 <a:solidFill>
                   <a:srgbClr val="333333"/>
                 </a:solidFill>
@@ -9178,7 +9178,7 @@
               <a:t>–   </a:t>
             </a:r>
             <a:r>
-              <a:rPr sz="1500" b="1" i="0">
+              <a:rPr sz="2000" b="1" i="0">
                 <a:solidFill>
                   <a:srgbClr val="333333"/>
                 </a:solidFill>
@@ -9187,7 +9187,7 @@
               <a:t>Objetivo:</a:t>
             </a:r>
             <a:r>
-              <a:rPr sz="1500" b="0" i="0">
+              <a:rPr sz="2000" b="0" i="0">
                 <a:solidFill>
                   <a:srgbClr val="333333"/>
                 </a:solidFill>
@@ -9203,7 +9203,7 @@
               </a:spcAft>
             </a:pPr>
             <a:r>
-              <a:rPr sz="1500" b="0" i="0">
+              <a:rPr sz="2000" b="0" i="0">
                 <a:solidFill>
                   <a:srgbClr val="333333"/>
                 </a:solidFill>
@@ -9212,7 +9212,7 @@
               <a:t>–   </a:t>
             </a:r>
             <a:r>
-              <a:rPr sz="1500" b="1" i="0">
+              <a:rPr sz="2000" b="1" i="0">
                 <a:solidFill>
                   <a:srgbClr val="333333"/>
                 </a:solidFill>
@@ -9221,7 +9221,7 @@
               <a:t>Exito:</a:t>
             </a:r>
             <a:r>
-              <a:rPr sz="1500" b="0" i="0">
+              <a:rPr sz="2000" b="0" i="0">
                 <a:solidFill>
                   <a:srgbClr val="333333"/>
                 </a:solidFill>
@@ -9237,7 +9237,7 @@
               </a:spcAft>
             </a:pPr>
             <a:r>
-              <a:rPr sz="1500" b="0" i="0">
+              <a:rPr sz="2000" b="0" i="0">
                 <a:solidFill>
                   <a:srgbClr val="333333"/>
                 </a:solidFill>
@@ -9246,7 +9246,7 @@
               <a:t>–   </a:t>
             </a:r>
             <a:r>
-              <a:rPr sz="1500" b="1" i="0">
+              <a:rPr sz="2000" b="1" i="0">
                 <a:solidFill>
                   <a:srgbClr val="333333"/>
                 </a:solidFill>
@@ -9255,7 +9255,7 @@
               <a:t>Exito:</a:t>
             </a:r>
             <a:r>
-              <a:rPr sz="1500" b="0" i="0">
+              <a:rPr sz="2000" b="0" i="0">
                 <a:solidFill>
                   <a:srgbClr val="333333"/>
                 </a:solidFill>
@@ -9271,7 +9271,7 @@
               </a:spcAft>
             </a:pPr>
             <a:r>
-              <a:rPr sz="1500" b="0" i="0">
+              <a:rPr sz="2000" b="0" i="0">
                 <a:solidFill>
                   <a:srgbClr val="333333"/>
                 </a:solidFill>
@@ -9280,7 +9280,7 @@
               <a:t>–   </a:t>
             </a:r>
             <a:r>
-              <a:rPr sz="1500" b="1" i="0">
+              <a:rPr sz="2000" b="1" i="0">
                 <a:solidFill>
                   <a:srgbClr val="333333"/>
                 </a:solidFill>
@@ -9289,7 +9289,7 @@
               <a:t>Exito:</a:t>
             </a:r>
             <a:r>
-              <a:rPr sz="1500" b="0" i="0">
+              <a:rPr sz="2000" b="0" i="0">
                 <a:solidFill>
                   <a:srgbClr val="333333"/>
                 </a:solidFill>
@@ -9305,7 +9305,7 @@
               </a:spcAft>
             </a:pPr>
             <a:r>
-              <a:rPr sz="1500" b="0" i="0">
+              <a:rPr sz="2000" b="0" i="0">
                 <a:solidFill>
                   <a:srgbClr val="333333"/>
                 </a:solidFill>
@@ -9314,7 +9314,7 @@
               <a:t>–   </a:t>
             </a:r>
             <a:r>
-              <a:rPr sz="1500" b="1" i="0">
+              <a:rPr sz="2000" b="1" i="0">
                 <a:solidFill>
                   <a:srgbClr val="333333"/>
                 </a:solidFill>
@@ -9323,7 +9323,7 @@
               <a:t>Exito:</a:t>
             </a:r>
             <a:r>
-              <a:rPr sz="1500" b="0" i="0">
+              <a:rPr sz="2000" b="0" i="0">
                 <a:solidFill>
                   <a:srgbClr val="333333"/>
                 </a:solidFill>
@@ -9339,7 +9339,7 @@
               </a:spcAft>
             </a:pPr>
             <a:r>
-              <a:rPr sz="1500" b="0" i="0">
+              <a:rPr sz="2000" b="0" i="0">
                 <a:solidFill>
                   <a:srgbClr val="333333"/>
                 </a:solidFill>
@@ -9348,7 +9348,7 @@
               <a:t>–   </a:t>
             </a:r>
             <a:r>
-              <a:rPr sz="1500" b="1" i="0">
+              <a:rPr sz="2000" b="1" i="0">
                 <a:solidFill>
                   <a:srgbClr val="333333"/>
                 </a:solidFill>
@@ -9357,7 +9357,7 @@
               <a:t>Exito:</a:t>
             </a:r>
             <a:r>
-              <a:rPr sz="1500" b="0" i="0">
+              <a:rPr sz="2000" b="0" i="0">
                 <a:solidFill>
                   <a:srgbClr val="333333"/>
                 </a:solidFill>
@@ -9577,7 +9577,7 @@
               </a:spcAft>
             </a:pPr>
             <a:r>
-              <a:rPr sz="1600" b="0" i="0">
+              <a:rPr sz="2000" b="0" i="0">
                 <a:solidFill>
                   <a:srgbClr val="333333"/>
                 </a:solidFill>

--- a/Bases de Datos II/Clases/Clase 13 - Analisis de casos reales/Presentacion.pptx
+++ b/Bases de Datos II/Clases/Clase 13 - Analisis de casos reales/Presentacion.pptx
@@ -5169,7 +5169,7 @@
                 </a:solidFill>
                 <a:latin typeface="Calibri"/>
               </a:rPr>
-              <a:t>–   Evidencia: el SQL y su salida quedan guardados en cada pregunta de ExamLab.</a:t>
+              <a:t>–   Evidencia: el SQL y su salida quedan guardados en cada pregunta de la plataforma del curso.</a:t>
             </a:r>
           </a:p>
           <a:p>
@@ -5226,7 +5226,7 @@
                 </a:solidFill>
                 <a:latin typeface="Calibri"/>
               </a:rPr>
-              <a:t>Entrega en ExamLab</a:t>
+              <a:t>Entrega en la plataforma del curso</a:t>
             </a:r>
             <a:r>
               <a:rPr sz="2000" b="0" i="0">
@@ -5235,7 +5235,7 @@
                 </a:solidFill>
                 <a:latin typeface="Calibri"/>
               </a:rPr>
-              <a:t> (https://uniaj.examlab.workers.dev/) — domingo 23:59 cuando aplique taller.</a:t>
+              <a:t> — en la fecha que indique el docente.</a:t>
             </a:r>
           </a:p>
         </p:txBody>
@@ -5830,7 +5830,7 @@
                 </a:solidFill>
                 <a:latin typeface="Calibri"/>
               </a:rPr>
-              <a:t>Taller de la semana en ExamLab (https://uniaj.examlab.workers.dev/): domingo 23:59 (regla del Acuerdo) cuando aplique.</a:t>
+              <a:t>Si el docente asigna taller esta semana, él indica el canal y la fecha.</a:t>
             </a:r>
           </a:p>
         </p:txBody>
@@ -9363,7 +9363,7 @@
                 </a:solidFill>
                 <a:latin typeface="Calibri"/>
               </a:rPr>
-              <a:t> Domingo 23:59.</a:t>
+              <a:t> en la fecha que indique el docente.</a:t>
             </a:r>
           </a:p>
         </p:txBody>
